--- a/2Bim/CodigoRotacaoEsquerda.pptx
+++ b/2Bim/CodigoRotacaoEsquerda.pptx
@@ -264,7 +264,7 @@
           <a:p>
             <a:fld id="{740D1A6C-CC66-449C-BF8F-24D2D39D47FD}" type="datetimeFigureOut">
               <a:rPr lang="pt-BR" smtClean="0"/>
-              <a:t>13/05/2026</a:t>
+              <a:t>19/05/2026</a:t>
             </a:fld>
             <a:endParaRPr lang="pt-BR"/>
           </a:p>
@@ -462,7 +462,7 @@
           <a:p>
             <a:fld id="{740D1A6C-CC66-449C-BF8F-24D2D39D47FD}" type="datetimeFigureOut">
               <a:rPr lang="pt-BR" smtClean="0"/>
-              <a:t>13/05/2026</a:t>
+              <a:t>19/05/2026</a:t>
             </a:fld>
             <a:endParaRPr lang="pt-BR"/>
           </a:p>
@@ -670,7 +670,7 @@
           <a:p>
             <a:fld id="{740D1A6C-CC66-449C-BF8F-24D2D39D47FD}" type="datetimeFigureOut">
               <a:rPr lang="pt-BR" smtClean="0"/>
-              <a:t>13/05/2026</a:t>
+              <a:t>19/05/2026</a:t>
             </a:fld>
             <a:endParaRPr lang="pt-BR"/>
           </a:p>
@@ -868,7 +868,7 @@
           <a:p>
             <a:fld id="{740D1A6C-CC66-449C-BF8F-24D2D39D47FD}" type="datetimeFigureOut">
               <a:rPr lang="pt-BR" smtClean="0"/>
-              <a:t>13/05/2026</a:t>
+              <a:t>19/05/2026</a:t>
             </a:fld>
             <a:endParaRPr lang="pt-BR"/>
           </a:p>
@@ -1143,7 +1143,7 @@
           <a:p>
             <a:fld id="{740D1A6C-CC66-449C-BF8F-24D2D39D47FD}" type="datetimeFigureOut">
               <a:rPr lang="pt-BR" smtClean="0"/>
-              <a:t>13/05/2026</a:t>
+              <a:t>19/05/2026</a:t>
             </a:fld>
             <a:endParaRPr lang="pt-BR"/>
           </a:p>
@@ -1408,7 +1408,7 @@
           <a:p>
             <a:fld id="{740D1A6C-CC66-449C-BF8F-24D2D39D47FD}" type="datetimeFigureOut">
               <a:rPr lang="pt-BR" smtClean="0"/>
-              <a:t>13/05/2026</a:t>
+              <a:t>19/05/2026</a:t>
             </a:fld>
             <a:endParaRPr lang="pt-BR"/>
           </a:p>
@@ -1820,7 +1820,7 @@
           <a:p>
             <a:fld id="{740D1A6C-CC66-449C-BF8F-24D2D39D47FD}" type="datetimeFigureOut">
               <a:rPr lang="pt-BR" smtClean="0"/>
-              <a:t>13/05/2026</a:t>
+              <a:t>19/05/2026</a:t>
             </a:fld>
             <a:endParaRPr lang="pt-BR"/>
           </a:p>
@@ -1961,7 +1961,7 @@
           <a:p>
             <a:fld id="{740D1A6C-CC66-449C-BF8F-24D2D39D47FD}" type="datetimeFigureOut">
               <a:rPr lang="pt-BR" smtClean="0"/>
-              <a:t>13/05/2026</a:t>
+              <a:t>19/05/2026</a:t>
             </a:fld>
             <a:endParaRPr lang="pt-BR"/>
           </a:p>
@@ -2074,7 +2074,7 @@
           <a:p>
             <a:fld id="{740D1A6C-CC66-449C-BF8F-24D2D39D47FD}" type="datetimeFigureOut">
               <a:rPr lang="pt-BR" smtClean="0"/>
-              <a:t>13/05/2026</a:t>
+              <a:t>19/05/2026</a:t>
             </a:fld>
             <a:endParaRPr lang="pt-BR"/>
           </a:p>
@@ -2385,7 +2385,7 @@
           <a:p>
             <a:fld id="{740D1A6C-CC66-449C-BF8F-24D2D39D47FD}" type="datetimeFigureOut">
               <a:rPr lang="pt-BR" smtClean="0"/>
-              <a:t>13/05/2026</a:t>
+              <a:t>19/05/2026</a:t>
             </a:fld>
             <a:endParaRPr lang="pt-BR"/>
           </a:p>
@@ -2673,7 +2673,7 @@
           <a:p>
             <a:fld id="{740D1A6C-CC66-449C-BF8F-24D2D39D47FD}" type="datetimeFigureOut">
               <a:rPr lang="pt-BR" smtClean="0"/>
-              <a:t>13/05/2026</a:t>
+              <a:t>19/05/2026</a:t>
             </a:fld>
             <a:endParaRPr lang="pt-BR"/>
           </a:p>
@@ -2914,7 +2914,7 @@
           <a:p>
             <a:fld id="{740D1A6C-CC66-449C-BF8F-24D2D39D47FD}" type="datetimeFigureOut">
               <a:rPr lang="pt-BR" smtClean="0"/>
-              <a:t>13/05/2026</a:t>
+              <a:t>19/05/2026</a:t>
             </a:fld>
             <a:endParaRPr lang="pt-BR"/>
           </a:p>
@@ -3842,10 +3842,10 @@
       </p:sp>
       <p:pic>
         <p:nvPicPr>
-          <p:cNvPr id="5" name="Espaço Reservado para Conteúdo 4">
-            <a:extLst>
-              <a:ext uri="{FF2B5EF4-FFF2-40B4-BE49-F238E27FC236}">
-                <a16:creationId xmlns:a16="http://schemas.microsoft.com/office/drawing/2014/main" id="{CE26461D-7665-B41B-59EB-50A966C94565}"/>
+          <p:cNvPr id="8" name="Espaço Reservado para Conteúdo 7">
+            <a:extLst>
+              <a:ext uri="{FF2B5EF4-FFF2-40B4-BE49-F238E27FC236}">
+                <a16:creationId xmlns:a16="http://schemas.microsoft.com/office/drawing/2014/main" id="{891A1D00-F5E7-8FEA-B40A-4D5176EE3722}"/>
               </a:ext>
             </a:extLst>
           </p:cNvPr>
@@ -3864,8 +3864,8 @@
         </p:blipFill>
         <p:spPr>
           <a:xfrm>
-            <a:off x="41948" y="1981201"/>
-            <a:ext cx="12108103" cy="4789714"/>
+            <a:off x="0" y="1534886"/>
+            <a:ext cx="12150051" cy="5272859"/>
           </a:xfrm>
           <a:prstGeom prst="rect">
             <a:avLst/>
